--- a/prompt-engineering-course/prompt_engineering_presentation_support/PE_S3_evaluation.pptx
+++ b/prompt-engineering-course/prompt_engineering_presentation_support/PE_S3_evaluation.pptx
@@ -2222,13 +2222,52 @@
       </p:sp>
       <p:sp>
         <p:nvSpPr>
-          <p:cNvPr id="4" name="Shape 2"/>
+          <p:cNvPr id="4" name="Text 2"/>
+          <p:cNvSpPr txBox="1"/>
+          <p:nvPr/>
+        </p:nvSpPr>
+        <p:spPr>
+          <a:xfrm>
+            <a:off x="548640" y="1627632"/>
+            <a:ext cx="10881360" cy="502920"/>
+          </a:xfrm>
+          <a:prstGeom prst="rect">
+            <a:avLst/>
+          </a:prstGeom>
+          <a:noFill/>
+          <a:ln/>
+        </p:spPr>
+        <p:txBody>
+          <a:bodyPr wrap="square" lIns="0" tIns="0" rIns="0" bIns="0" rtlCol="0" anchor="t"/>
+          <a:lstStyle/>
+          <a:p>
+            <a:pPr algn="l" indent="0" marL="0">
+              <a:buNone/>
+            </a:pPr>
+            <a:r>
+              <a:rPr lang="en-US" sz="1500" dirty="0">
+                <a:solidFill>
+                  <a:srgbClr val="A9B1D6"/>
+                </a:solidFill>
+                <a:latin typeface="Calibri" pitchFamily="34" charset="0"/>
+                <a:ea typeface="Calibri" pitchFamily="34" charset="-122"/>
+                <a:cs typeface="Calibri" pitchFamily="34" charset="-120"/>
+              </a:rPr>
+              <a:t>Put it all together and you get the loop you'll run for the rest of the course.</a:t>
+            </a:r>
+            <a:endParaRPr lang="en-US" sz="1500" dirty="0"/>
+          </a:p>
+        </p:txBody>
+      </p:sp>
+      <p:sp>
+        <p:nvSpPr>
+          <p:cNvPr id="5" name="Shape 3"/>
           <p:cNvSpPr/>
           <p:nvPr/>
         </p:nvSpPr>
         <p:spPr>
           <a:xfrm>
-            <a:off x="548640" y="2103120"/>
+            <a:off x="548640" y="2432304"/>
             <a:ext cx="530352" cy="530352"/>
           </a:xfrm>
           <a:prstGeom prst="ellipse">
@@ -2242,13 +2281,13 @@
       </p:sp>
       <p:sp>
         <p:nvSpPr>
-          <p:cNvPr id="5" name="Text 3"/>
-          <p:cNvSpPr txBox="1"/>
-          <p:nvPr/>
-        </p:nvSpPr>
-        <p:spPr>
-          <a:xfrm>
-            <a:off x="548640" y="2103120"/>
+          <p:cNvPr id="6" name="Text 4"/>
+          <p:cNvSpPr txBox="1"/>
+          <p:nvPr/>
+        </p:nvSpPr>
+        <p:spPr>
+          <a:xfrm>
+            <a:off x="548640" y="2432304"/>
             <a:ext cx="530352" cy="530352"/>
           </a:xfrm>
           <a:prstGeom prst="rect">
@@ -2281,13 +2320,13 @@
       </p:sp>
       <p:sp>
         <p:nvSpPr>
-          <p:cNvPr id="6" name="Text 4"/>
-          <p:cNvSpPr txBox="1"/>
-          <p:nvPr/>
-        </p:nvSpPr>
-        <p:spPr>
-          <a:xfrm>
-            <a:off x="1325880" y="2084832"/>
+          <p:cNvPr id="7" name="Text 5"/>
+          <p:cNvSpPr txBox="1"/>
+          <p:nvPr/>
+        </p:nvSpPr>
+        <p:spPr>
+          <a:xfrm>
+            <a:off x="1325880" y="2414016"/>
             <a:ext cx="10424160" cy="411480"/>
           </a:xfrm>
           <a:prstGeom prst="rect">
@@ -2320,14 +2359,14 @@
       </p:sp>
       <p:sp>
         <p:nvSpPr>
-          <p:cNvPr id="7" name="Text 5"/>
-          <p:cNvSpPr txBox="1"/>
-          <p:nvPr/>
-        </p:nvSpPr>
-        <p:spPr>
-          <a:xfrm>
-            <a:off x="1325880" y="2468880"/>
-            <a:ext cx="10424160" cy="667512"/>
+          <p:cNvPr id="8" name="Text 6"/>
+          <p:cNvSpPr txBox="1"/>
+          <p:nvPr/>
+        </p:nvSpPr>
+        <p:spPr>
+          <a:xfrm>
+            <a:off x="1325880" y="2798064"/>
+            <a:ext cx="10424160" cy="585216"/>
           </a:xfrm>
           <a:prstGeom prst="rect">
             <a:avLst/>
@@ -2359,13 +2398,13 @@
       </p:sp>
       <p:sp>
         <p:nvSpPr>
-          <p:cNvPr id="8" name="Shape 6"/>
+          <p:cNvPr id="9" name="Shape 7"/>
           <p:cNvSpPr/>
           <p:nvPr/>
         </p:nvSpPr>
         <p:spPr>
           <a:xfrm>
-            <a:off x="548640" y="3209544"/>
+            <a:off x="548640" y="3456432"/>
             <a:ext cx="530352" cy="530352"/>
           </a:xfrm>
           <a:prstGeom prst="ellipse">
@@ -2379,13 +2418,13 @@
       </p:sp>
       <p:sp>
         <p:nvSpPr>
-          <p:cNvPr id="9" name="Text 7"/>
-          <p:cNvSpPr txBox="1"/>
-          <p:nvPr/>
-        </p:nvSpPr>
-        <p:spPr>
-          <a:xfrm>
-            <a:off x="548640" y="3209544"/>
+          <p:cNvPr id="10" name="Text 8"/>
+          <p:cNvSpPr txBox="1"/>
+          <p:nvPr/>
+        </p:nvSpPr>
+        <p:spPr>
+          <a:xfrm>
+            <a:off x="548640" y="3456432"/>
             <a:ext cx="530352" cy="530352"/>
           </a:xfrm>
           <a:prstGeom prst="rect">
@@ -2418,13 +2457,13 @@
       </p:sp>
       <p:sp>
         <p:nvSpPr>
-          <p:cNvPr id="10" name="Text 8"/>
-          <p:cNvSpPr txBox="1"/>
-          <p:nvPr/>
-        </p:nvSpPr>
-        <p:spPr>
-          <a:xfrm>
-            <a:off x="1325880" y="3191256"/>
+          <p:cNvPr id="11" name="Text 9"/>
+          <p:cNvSpPr txBox="1"/>
+          <p:nvPr/>
+        </p:nvSpPr>
+        <p:spPr>
+          <a:xfrm>
+            <a:off x="1325880" y="3438144"/>
             <a:ext cx="10424160" cy="411480"/>
           </a:xfrm>
           <a:prstGeom prst="rect">
@@ -2457,14 +2496,14 @@
       </p:sp>
       <p:sp>
         <p:nvSpPr>
-          <p:cNvPr id="11" name="Text 9"/>
-          <p:cNvSpPr txBox="1"/>
-          <p:nvPr/>
-        </p:nvSpPr>
-        <p:spPr>
-          <a:xfrm>
-            <a:off x="1325880" y="3575304"/>
-            <a:ext cx="10424160" cy="667512"/>
+          <p:cNvPr id="12" name="Text 10"/>
+          <p:cNvSpPr txBox="1"/>
+          <p:nvPr/>
+        </p:nvSpPr>
+        <p:spPr>
+          <a:xfrm>
+            <a:off x="1325880" y="3822192"/>
+            <a:ext cx="10424160" cy="585216"/>
           </a:xfrm>
           <a:prstGeom prst="rect">
             <a:avLst/>
@@ -2496,13 +2535,13 @@
       </p:sp>
       <p:sp>
         <p:nvSpPr>
-          <p:cNvPr id="12" name="Shape 10"/>
+          <p:cNvPr id="13" name="Shape 11"/>
           <p:cNvSpPr/>
           <p:nvPr/>
         </p:nvSpPr>
         <p:spPr>
           <a:xfrm>
-            <a:off x="548640" y="4315968"/>
+            <a:off x="548640" y="4480560"/>
             <a:ext cx="530352" cy="530352"/>
           </a:xfrm>
           <a:prstGeom prst="ellipse">
@@ -2516,13 +2555,13 @@
       </p:sp>
       <p:sp>
         <p:nvSpPr>
-          <p:cNvPr id="13" name="Text 11"/>
-          <p:cNvSpPr txBox="1"/>
-          <p:nvPr/>
-        </p:nvSpPr>
-        <p:spPr>
-          <a:xfrm>
-            <a:off x="548640" y="4315968"/>
+          <p:cNvPr id="14" name="Text 12"/>
+          <p:cNvSpPr txBox="1"/>
+          <p:nvPr/>
+        </p:nvSpPr>
+        <p:spPr>
+          <a:xfrm>
+            <a:off x="548640" y="4480560"/>
             <a:ext cx="530352" cy="530352"/>
           </a:xfrm>
           <a:prstGeom prst="rect">
@@ -2555,13 +2594,13 @@
       </p:sp>
       <p:sp>
         <p:nvSpPr>
-          <p:cNvPr id="14" name="Text 12"/>
-          <p:cNvSpPr txBox="1"/>
-          <p:nvPr/>
-        </p:nvSpPr>
-        <p:spPr>
-          <a:xfrm>
-            <a:off x="1325880" y="4297680"/>
+          <p:cNvPr id="15" name="Text 13"/>
+          <p:cNvSpPr txBox="1"/>
+          <p:nvPr/>
+        </p:nvSpPr>
+        <p:spPr>
+          <a:xfrm>
+            <a:off x="1325880" y="4462272"/>
             <a:ext cx="10424160" cy="411480"/>
           </a:xfrm>
           <a:prstGeom prst="rect">
@@ -2594,14 +2633,14 @@
       </p:sp>
       <p:sp>
         <p:nvSpPr>
-          <p:cNvPr id="15" name="Text 13"/>
-          <p:cNvSpPr txBox="1"/>
-          <p:nvPr/>
-        </p:nvSpPr>
-        <p:spPr>
-          <a:xfrm>
-            <a:off x="1325880" y="4681728"/>
-            <a:ext cx="10424160" cy="667512"/>
+          <p:cNvPr id="16" name="Text 14"/>
+          <p:cNvSpPr txBox="1"/>
+          <p:nvPr/>
+        </p:nvSpPr>
+        <p:spPr>
+          <a:xfrm>
+            <a:off x="1325880" y="4846320"/>
+            <a:ext cx="10424160" cy="585216"/>
           </a:xfrm>
           <a:prstGeom prst="rect">
             <a:avLst/>
@@ -2633,13 +2672,13 @@
       </p:sp>
       <p:sp>
         <p:nvSpPr>
-          <p:cNvPr id="16" name="Shape 14"/>
+          <p:cNvPr id="17" name="Shape 15"/>
           <p:cNvSpPr/>
           <p:nvPr/>
         </p:nvSpPr>
         <p:spPr>
           <a:xfrm>
-            <a:off x="548640" y="5422392"/>
+            <a:off x="548640" y="5504688"/>
             <a:ext cx="530352" cy="530352"/>
           </a:xfrm>
           <a:prstGeom prst="ellipse">
@@ -2653,13 +2692,13 @@
       </p:sp>
       <p:sp>
         <p:nvSpPr>
-          <p:cNvPr id="17" name="Text 15"/>
-          <p:cNvSpPr txBox="1"/>
-          <p:nvPr/>
-        </p:nvSpPr>
-        <p:spPr>
-          <a:xfrm>
-            <a:off x="548640" y="5422392"/>
+          <p:cNvPr id="18" name="Text 16"/>
+          <p:cNvSpPr txBox="1"/>
+          <p:nvPr/>
+        </p:nvSpPr>
+        <p:spPr>
+          <a:xfrm>
+            <a:off x="548640" y="5504688"/>
             <a:ext cx="530352" cy="530352"/>
           </a:xfrm>
           <a:prstGeom prst="rect">
@@ -2692,13 +2731,13 @@
       </p:sp>
       <p:sp>
         <p:nvSpPr>
-          <p:cNvPr id="18" name="Text 16"/>
-          <p:cNvSpPr txBox="1"/>
-          <p:nvPr/>
-        </p:nvSpPr>
-        <p:spPr>
-          <a:xfrm>
-            <a:off x="1325880" y="5404104"/>
+          <p:cNvPr id="19" name="Text 17"/>
+          <p:cNvSpPr txBox="1"/>
+          <p:nvPr/>
+        </p:nvSpPr>
+        <p:spPr>
+          <a:xfrm>
+            <a:off x="1325880" y="5486400"/>
             <a:ext cx="10424160" cy="411480"/>
           </a:xfrm>
           <a:prstGeom prst="rect">
@@ -2731,14 +2770,14 @@
       </p:sp>
       <p:sp>
         <p:nvSpPr>
-          <p:cNvPr id="19" name="Text 17"/>
-          <p:cNvSpPr txBox="1"/>
-          <p:nvPr/>
-        </p:nvSpPr>
-        <p:spPr>
-          <a:xfrm>
-            <a:off x="1325880" y="5788152"/>
-            <a:ext cx="10424160" cy="667512"/>
+          <p:cNvPr id="20" name="Text 18"/>
+          <p:cNvSpPr txBox="1"/>
+          <p:nvPr/>
+        </p:nvSpPr>
+        <p:spPr>
+          <a:xfrm>
+            <a:off x="1325880" y="5870448"/>
+            <a:ext cx="10424160" cy="585216"/>
           </a:xfrm>
           <a:prstGeom prst="rect">
             <a:avLst/>
@@ -2770,7 +2809,7 @@
       </p:sp>
       <p:sp>
         <p:nvSpPr>
-          <p:cNvPr id="20" name="Shape 18"/>
+          <p:cNvPr id="21" name="Shape 19"/>
           <p:cNvSpPr/>
           <p:nvPr/>
         </p:nvSpPr>
@@ -2792,7 +2831,7 @@
       </p:sp>
       <p:sp>
         <p:nvSpPr>
-          <p:cNvPr id="21" name="Text 19"/>
+          <p:cNvPr id="22" name="Text 20"/>
           <p:cNvSpPr txBox="1"/>
           <p:nvPr/>
         </p:nvSpPr>
@@ -2831,7 +2870,7 @@
       </p:sp>
       <p:sp>
         <p:nvSpPr>
-          <p:cNvPr id="22" name="Text 20"/>
+          <p:cNvPr id="23" name="Text 21"/>
           <p:cNvSpPr txBox="1"/>
           <p:nvPr/>
         </p:nvSpPr>
@@ -2870,7 +2909,7 @@
       </p:sp>
       <p:sp>
         <p:nvSpPr>
-          <p:cNvPr id="23" name="Text 21"/>
+          <p:cNvPr id="24" name="Text 22"/>
           <p:cNvSpPr txBox="1"/>
           <p:nvPr/>
         </p:nvSpPr>
@@ -5167,7 +5206,7 @@
     <p:bg>
       <p:bgPr>
         <a:solidFill>
-          <a:srgbClr val="281C16"/>
+          <a:srgbClr val="301A12"/>
         </a:solidFill>
       </p:bgPr>
     </p:bg>
@@ -5193,12 +5232,12 @@
         </p:nvSpPr>
         <p:spPr>
           <a:xfrm>
-            <a:off x="10588752" y="502920"/>
-            <a:ext cx="1051560" cy="384048"/>
+            <a:off x="10405872" y="457200"/>
+            <a:ext cx="1234440" cy="457200"/>
           </a:xfrm>
           <a:prstGeom prst="roundRect">
             <a:avLst>
-              <a:gd name="adj" fmla="val 47619"/>
+              <a:gd name="adj" fmla="val 20000"/>
             </a:avLst>
           </a:prstGeom>
           <a:solidFill>
@@ -5215,8 +5254,8 @@
         </p:nvSpPr>
         <p:spPr>
           <a:xfrm>
-            <a:off x="10588752" y="502920"/>
-            <a:ext cx="1051560" cy="384048"/>
+            <a:off x="10405872" y="457200"/>
+            <a:ext cx="1234440" cy="457200"/>
           </a:xfrm>
           <a:prstGeom prst="rect">
             <a:avLst/>
@@ -5232,17 +5271,17 @@
               <a:buNone/>
             </a:pPr>
             <a:r>
-              <a:rPr lang="en-US" sz="1300" b="1" spc="200" kern="0" dirty="0">
-                <a:solidFill>
-                  <a:srgbClr val="281C16"/>
+              <a:rPr lang="en-US" sz="1400" b="1" spc="200" kern="0" dirty="0">
+                <a:solidFill>
+                  <a:srgbClr val="301A12"/>
                 </a:solidFill>
                 <a:latin typeface="Courier New" pitchFamily="34" charset="0"/>
                 <a:ea typeface="Courier New" pitchFamily="34" charset="-122"/>
                 <a:cs typeface="Courier New" pitchFamily="34" charset="-120"/>
               </a:rPr>
-              <a:t>GIT</a:t>
-            </a:r>
-            <a:endParaRPr lang="en-US" sz="1300" dirty="0"/>
+              <a:t>● GIT</a:t>
+            </a:r>
+            <a:endParaRPr lang="en-US" sz="1400" dirty="0"/>
           </a:p>
         </p:txBody>
       </p:sp>
@@ -5312,7 +5351,7 @@
             <a:r>
               <a:rPr lang="en-US" sz="3400" b="1" dirty="0">
                 <a:solidFill>
-                  <a:srgbClr val="C0CAF5"/>
+                  <a:srgbClr val="F6E6DB"/>
                 </a:solidFill>
                 <a:latin typeface="Calibri" pitchFamily="34" charset="0"/>
                 <a:ea typeface="Calibri" pitchFamily="34" charset="-122"/>
@@ -5371,7 +5410,7 @@
             <a:r>
               <a:rPr lang="en-US" sz="1800" b="1" dirty="0">
                 <a:solidFill>
-                  <a:srgbClr val="1A1B26"/>
+                  <a:srgbClr val="301A12"/>
                 </a:solidFill>
                 <a:latin typeface="Courier New" pitchFamily="34" charset="0"/>
                 <a:ea typeface="Courier New" pitchFamily="34" charset="-122"/>
@@ -5410,7 +5449,7 @@
             <a:r>
               <a:rPr lang="en-US" sz="1700" b="1" dirty="0">
                 <a:solidFill>
-                  <a:srgbClr val="C0CAF5"/>
+                  <a:srgbClr val="F6E6DB"/>
                 </a:solidFill>
                 <a:latin typeface="Calibri" pitchFamily="34" charset="0"/>
                 <a:ea typeface="Calibri" pitchFamily="34" charset="-122"/>
@@ -5449,7 +5488,7 @@
             <a:r>
               <a:rPr lang="en-US" sz="1350" dirty="0">
                 <a:solidFill>
-                  <a:srgbClr val="A9B1D6"/>
+                  <a:srgbClr val="E0C6B6"/>
                 </a:solidFill>
                 <a:latin typeface="Calibri" pitchFamily="34" charset="0"/>
                 <a:ea typeface="Calibri" pitchFamily="34" charset="-122"/>
@@ -5508,7 +5547,7 @@
             <a:r>
               <a:rPr lang="en-US" sz="1800" b="1" dirty="0">
                 <a:solidFill>
-                  <a:srgbClr val="1A1B26"/>
+                  <a:srgbClr val="301A12"/>
                 </a:solidFill>
                 <a:latin typeface="Courier New" pitchFamily="34" charset="0"/>
                 <a:ea typeface="Courier New" pitchFamily="34" charset="-122"/>
@@ -5547,7 +5586,7 @@
             <a:r>
               <a:rPr lang="en-US" sz="1700" b="1" dirty="0">
                 <a:solidFill>
-                  <a:srgbClr val="C0CAF5"/>
+                  <a:srgbClr val="F6E6DB"/>
                 </a:solidFill>
                 <a:latin typeface="Calibri" pitchFamily="34" charset="0"/>
                 <a:ea typeface="Calibri" pitchFamily="34" charset="-122"/>
@@ -5586,7 +5625,7 @@
             <a:r>
               <a:rPr lang="en-US" sz="1350" dirty="0">
                 <a:solidFill>
-                  <a:srgbClr val="A9B1D6"/>
+                  <a:srgbClr val="E0C6B6"/>
                 </a:solidFill>
                 <a:latin typeface="Calibri" pitchFamily="34" charset="0"/>
                 <a:ea typeface="Calibri" pitchFamily="34" charset="-122"/>
@@ -5645,7 +5684,7 @@
             <a:r>
               <a:rPr lang="en-US" sz="1800" b="1" dirty="0">
                 <a:solidFill>
-                  <a:srgbClr val="1A1B26"/>
+                  <a:srgbClr val="301A12"/>
                 </a:solidFill>
                 <a:latin typeface="Courier New" pitchFamily="34" charset="0"/>
                 <a:ea typeface="Courier New" pitchFamily="34" charset="-122"/>
@@ -5684,7 +5723,7 @@
             <a:r>
               <a:rPr lang="en-US" sz="1700" b="1" dirty="0">
                 <a:solidFill>
-                  <a:srgbClr val="C0CAF5"/>
+                  <a:srgbClr val="F6E6DB"/>
                 </a:solidFill>
                 <a:latin typeface="Calibri" pitchFamily="34" charset="0"/>
                 <a:ea typeface="Calibri" pitchFamily="34" charset="-122"/>
@@ -5723,7 +5762,7 @@
             <a:r>
               <a:rPr lang="en-US" sz="1350" dirty="0">
                 <a:solidFill>
-                  <a:srgbClr val="A9B1D6"/>
+                  <a:srgbClr val="E0C6B6"/>
                 </a:solidFill>
                 <a:latin typeface="Calibri" pitchFamily="34" charset="0"/>
                 <a:ea typeface="Calibri" pitchFamily="34" charset="-122"/>
@@ -5782,7 +5821,7 @@
             <a:r>
               <a:rPr lang="en-US" sz="1800" b="1" dirty="0">
                 <a:solidFill>
-                  <a:srgbClr val="1A1B26"/>
+                  <a:srgbClr val="301A12"/>
                 </a:solidFill>
                 <a:latin typeface="Courier New" pitchFamily="34" charset="0"/>
                 <a:ea typeface="Courier New" pitchFamily="34" charset="-122"/>
@@ -5821,7 +5860,7 @@
             <a:r>
               <a:rPr lang="en-US" sz="1700" b="1" dirty="0">
                 <a:solidFill>
-                  <a:srgbClr val="C0CAF5"/>
+                  <a:srgbClr val="F6E6DB"/>
                 </a:solidFill>
                 <a:latin typeface="Calibri" pitchFamily="34" charset="0"/>
                 <a:ea typeface="Calibri" pitchFamily="34" charset="-122"/>
@@ -5860,7 +5899,7 @@
             <a:r>
               <a:rPr lang="en-US" sz="1350" dirty="0">
                 <a:solidFill>
-                  <a:srgbClr val="A9B1D6"/>
+                  <a:srgbClr val="E0C6B6"/>
                 </a:solidFill>
                 <a:latin typeface="Calibri" pitchFamily="34" charset="0"/>
                 <a:ea typeface="Calibri" pitchFamily="34" charset="-122"/>
@@ -6025,7 +6064,7 @@
     <p:bg>
       <p:bgPr>
         <a:solidFill>
-          <a:srgbClr val="281C16"/>
+          <a:srgbClr val="301A12"/>
         </a:solidFill>
       </p:bgPr>
     </p:bg>
@@ -6051,12 +6090,12 @@
         </p:nvSpPr>
         <p:spPr>
           <a:xfrm>
-            <a:off x="10588752" y="502920"/>
-            <a:ext cx="1051560" cy="384048"/>
+            <a:off x="10405872" y="457200"/>
+            <a:ext cx="1234440" cy="457200"/>
           </a:xfrm>
           <a:prstGeom prst="roundRect">
             <a:avLst>
-              <a:gd name="adj" fmla="val 47619"/>
+              <a:gd name="adj" fmla="val 20000"/>
             </a:avLst>
           </a:prstGeom>
           <a:solidFill>
@@ -6073,8 +6112,8 @@
         </p:nvSpPr>
         <p:spPr>
           <a:xfrm>
-            <a:off x="10588752" y="502920"/>
-            <a:ext cx="1051560" cy="384048"/>
+            <a:off x="10405872" y="457200"/>
+            <a:ext cx="1234440" cy="457200"/>
           </a:xfrm>
           <a:prstGeom prst="rect">
             <a:avLst/>
@@ -6090,17 +6129,17 @@
               <a:buNone/>
             </a:pPr>
             <a:r>
-              <a:rPr lang="en-US" sz="1300" b="1" spc="200" kern="0" dirty="0">
-                <a:solidFill>
-                  <a:srgbClr val="281C16"/>
+              <a:rPr lang="en-US" sz="1400" b="1" spc="200" kern="0" dirty="0">
+                <a:solidFill>
+                  <a:srgbClr val="301A12"/>
                 </a:solidFill>
                 <a:latin typeface="Courier New" pitchFamily="34" charset="0"/>
                 <a:ea typeface="Courier New" pitchFamily="34" charset="-122"/>
                 <a:cs typeface="Courier New" pitchFamily="34" charset="-120"/>
               </a:rPr>
-              <a:t>GIT</a:t>
-            </a:r>
-            <a:endParaRPr lang="en-US" sz="1300" dirty="0"/>
+              <a:t>● GIT</a:t>
+            </a:r>
+            <a:endParaRPr lang="en-US" sz="1400" dirty="0"/>
           </a:p>
         </p:txBody>
       </p:sp>
@@ -6170,7 +6209,7 @@
             <a:r>
               <a:rPr lang="en-US" sz="3400" b="1" dirty="0">
                 <a:solidFill>
-                  <a:srgbClr val="C0CAF5"/>
+                  <a:srgbClr val="F6E6DB"/>
                 </a:solidFill>
                 <a:latin typeface="Calibri" pitchFamily="34" charset="0"/>
                 <a:ea typeface="Calibri" pitchFamily="34" charset="-122"/>
@@ -6213,7 +6252,7 @@
             <a:r>
               <a:rPr lang="en-US" sz="1600" dirty="0">
                 <a:solidFill>
-                  <a:srgbClr val="A9B1D6"/>
+                  <a:srgbClr val="E0C6B6"/>
                 </a:solidFill>
                 <a:latin typeface="Calibri" pitchFamily="34" charset="0"/>
                 <a:ea typeface="Calibri" pitchFamily="34" charset="-122"/>
@@ -6234,7 +6273,7 @@
             <a:r>
               <a:rPr lang="en-US" sz="1600" dirty="0">
                 <a:solidFill>
-                  <a:srgbClr val="A9B1D6"/>
+                  <a:srgbClr val="E0C6B6"/>
                 </a:solidFill>
                 <a:latin typeface="Calibri" pitchFamily="34" charset="0"/>
                 <a:ea typeface="Calibri" pitchFamily="34" charset="-122"/>
@@ -6255,7 +6294,7 @@
             <a:r>
               <a:rPr lang="en-US" sz="1600" dirty="0">
                 <a:solidFill>
-                  <a:srgbClr val="A9B1D6"/>
+                  <a:srgbClr val="E0C6B6"/>
                 </a:solidFill>
                 <a:latin typeface="Calibri" pitchFamily="34" charset="0"/>
                 <a:ea typeface="Calibri" pitchFamily="34" charset="-122"/>
@@ -6276,7 +6315,7 @@
             <a:r>
               <a:rPr lang="en-US" sz="1600" dirty="0">
                 <a:solidFill>
-                  <a:srgbClr val="A9B1D6"/>
+                  <a:srgbClr val="E0C6B6"/>
                 </a:solidFill>
                 <a:latin typeface="Calibri" pitchFamily="34" charset="0"/>
                 <a:ea typeface="Calibri" pitchFamily="34" charset="-122"/>
@@ -6305,7 +6344,7 @@
             </a:avLst>
           </a:prstGeom>
           <a:solidFill>
-            <a:srgbClr val="24283B"/>
+            <a:srgbClr val="3E2418"/>
           </a:solidFill>
           <a:ln w="15875">
             <a:solidFill>
@@ -6383,7 +6422,7 @@
         <p:spPr>
           <a:xfrm>
             <a:off x="7269480" y="3108960"/>
-            <a:ext cx="4160520" cy="2286000"/>
+            <a:ext cx="4160520" cy="2194560"/>
           </a:xfrm>
           <a:prstGeom prst="rect">
             <a:avLst/>
@@ -6401,7 +6440,7 @@
             <a:r>
               <a:rPr lang="en-US" sz="1600" dirty="0">
                 <a:solidFill>
-                  <a:srgbClr val="C0CAF5"/>
+                  <a:srgbClr val="F6E6DB"/>
                 </a:solidFill>
                 <a:latin typeface="Calibri" pitchFamily="34" charset="0"/>
                 <a:ea typeface="Calibri" pitchFamily="34" charset="-122"/>
@@ -6670,8 +6709,47 @@
         </p:nvSpPr>
         <p:spPr>
           <a:xfrm>
-            <a:off x="548640" y="2011680"/>
-            <a:ext cx="6126480" cy="3840480"/>
+            <a:off x="548640" y="1627632"/>
+            <a:ext cx="10881360" cy="502920"/>
+          </a:xfrm>
+          <a:prstGeom prst="rect">
+            <a:avLst/>
+          </a:prstGeom>
+          <a:noFill/>
+          <a:ln/>
+        </p:spPr>
+        <p:txBody>
+          <a:bodyPr wrap="square" lIns="0" tIns="0" rIns="0" bIns="0" rtlCol="0" anchor="t"/>
+          <a:lstStyle/>
+          <a:p>
+            <a:pPr algn="l" indent="0" marL="0">
+              <a:buNone/>
+            </a:pPr>
+            <a:r>
+              <a:rPr lang="en-US" sz="1500" dirty="0">
+                <a:solidFill>
+                  <a:srgbClr val="A9B1D6"/>
+                </a:solidFill>
+                <a:latin typeface="Calibri" pitchFamily="34" charset="0"/>
+                <a:ea typeface="Calibri" pitchFamily="34" charset="-122"/>
+                <a:cs typeface="Calibri" pitchFamily="34" charset="-120"/>
+              </a:rPr>
+              <a:t>This is the session that turns everything before it into engineering, so let's be clear on why measuring matters this much.</a:t>
+            </a:r>
+            <a:endParaRPr lang="en-US" sz="1500" dirty="0"/>
+          </a:p>
+        </p:txBody>
+      </p:sp>
+      <p:sp>
+        <p:nvSpPr>
+          <p:cNvPr id="5" name="Text 3"/>
+          <p:cNvSpPr txBox="1"/>
+          <p:nvPr/>
+        </p:nvSpPr>
+        <p:spPr>
+          <a:xfrm>
+            <a:off x="548640" y="2340864"/>
+            <a:ext cx="6126480" cy="3511296"/>
           </a:xfrm>
           <a:prstGeom prst="rect">
             <a:avLst/>
@@ -6809,18 +6887,18 @@
       </p:sp>
       <p:sp>
         <p:nvSpPr>
-          <p:cNvPr id="5" name="Shape 3"/>
+          <p:cNvPr id="6" name="Shape 4"/>
           <p:cNvSpPr/>
           <p:nvPr/>
         </p:nvSpPr>
         <p:spPr>
           <a:xfrm>
-            <a:off x="6995160" y="2148840"/>
-            <a:ext cx="4645152" cy="3383280"/>
+            <a:off x="6995160" y="2478024"/>
+            <a:ext cx="4645152" cy="3054096"/>
           </a:xfrm>
           <a:prstGeom prst="roundRect">
             <a:avLst>
-              <a:gd name="adj" fmla="val 2432"/>
+              <a:gd name="adj" fmla="val 2695"/>
             </a:avLst>
           </a:prstGeom>
           <a:solidFill>
@@ -6836,13 +6914,13 @@
       </p:sp>
       <p:sp>
         <p:nvSpPr>
-          <p:cNvPr id="6" name="Shape 4"/>
+          <p:cNvPr id="7" name="Shape 5"/>
           <p:cNvSpPr/>
           <p:nvPr/>
         </p:nvSpPr>
         <p:spPr>
           <a:xfrm>
-            <a:off x="7269480" y="2423160"/>
+            <a:off x="7269480" y="2752344"/>
             <a:ext cx="457200" cy="457200"/>
           </a:xfrm>
           <a:prstGeom prst="ellipse">
@@ -6856,13 +6934,13 @@
       </p:sp>
       <p:sp>
         <p:nvSpPr>
-          <p:cNvPr id="7" name="Text 5"/>
-          <p:cNvSpPr txBox="1"/>
-          <p:nvPr/>
-        </p:nvSpPr>
-        <p:spPr>
-          <a:xfrm>
-            <a:off x="7818120" y="2450592"/>
+          <p:cNvPr id="8" name="Text 6"/>
+          <p:cNvSpPr txBox="1"/>
+          <p:nvPr/>
+        </p:nvSpPr>
+        <p:spPr>
+          <a:xfrm>
+            <a:off x="7818120" y="2779776"/>
             <a:ext cx="3657600" cy="411480"/>
           </a:xfrm>
           <a:prstGeom prst="rect">
@@ -6895,14 +6973,14 @@
       </p:sp>
       <p:sp>
         <p:nvSpPr>
-          <p:cNvPr id="8" name="Text 6"/>
-          <p:cNvSpPr txBox="1"/>
-          <p:nvPr/>
-        </p:nvSpPr>
-        <p:spPr>
-          <a:xfrm>
-            <a:off x="7269480" y="3108960"/>
-            <a:ext cx="4160520" cy="2286000"/>
+          <p:cNvPr id="9" name="Text 7"/>
+          <p:cNvSpPr txBox="1"/>
+          <p:nvPr/>
+        </p:nvSpPr>
+        <p:spPr>
+          <a:xfrm>
+            <a:off x="7269480" y="3438144"/>
+            <a:ext cx="4160520" cy="1865376"/>
           </a:xfrm>
           <a:prstGeom prst="rect">
             <a:avLst/>
@@ -6934,7 +7012,7 @@
       </p:sp>
       <p:sp>
         <p:nvSpPr>
-          <p:cNvPr id="9" name="Shape 7"/>
+          <p:cNvPr id="10" name="Shape 8"/>
           <p:cNvSpPr/>
           <p:nvPr/>
         </p:nvSpPr>
@@ -6956,7 +7034,7 @@
       </p:sp>
       <p:sp>
         <p:nvSpPr>
-          <p:cNvPr id="10" name="Text 8"/>
+          <p:cNvPr id="11" name="Text 9"/>
           <p:cNvSpPr txBox="1"/>
           <p:nvPr/>
         </p:nvSpPr>
@@ -6995,7 +7073,7 @@
       </p:sp>
       <p:sp>
         <p:nvSpPr>
-          <p:cNvPr id="11" name="Text 9"/>
+          <p:cNvPr id="12" name="Text 10"/>
           <p:cNvSpPr txBox="1"/>
           <p:nvPr/>
         </p:nvSpPr>
@@ -7034,7 +7112,7 @@
       </p:sp>
       <p:sp>
         <p:nvSpPr>
-          <p:cNvPr id="12" name="Text 10"/>
+          <p:cNvPr id="13" name="Text 11"/>
           <p:cNvSpPr txBox="1"/>
           <p:nvPr/>
         </p:nvSpPr>
@@ -7183,13 +7261,52 @@
       </p:sp>
       <p:sp>
         <p:nvSpPr>
-          <p:cNvPr id="4" name="Shape 2"/>
+          <p:cNvPr id="4" name="Text 2"/>
+          <p:cNvSpPr txBox="1"/>
+          <p:nvPr/>
+        </p:nvSpPr>
+        <p:spPr>
+          <a:xfrm>
+            <a:off x="548640" y="1627632"/>
+            <a:ext cx="10881360" cy="502920"/>
+          </a:xfrm>
+          <a:prstGeom prst="rect">
+            <a:avLst/>
+          </a:prstGeom>
+          <a:noFill/>
+          <a:ln/>
+        </p:spPr>
+        <p:txBody>
+          <a:bodyPr wrap="square" lIns="0" tIns="0" rIns="0" bIns="0" rtlCol="0" anchor="t"/>
+          <a:lstStyle/>
+          <a:p>
+            <a:pPr algn="l" indent="0" marL="0">
+              <a:buNone/>
+            </a:pPr>
+            <a:r>
+              <a:rPr lang="en-US" sz="1500" dirty="0">
+                <a:solidFill>
+                  <a:srgbClr val="A9B1D6"/>
+                </a:solidFill>
+                <a:latin typeface="Calibri" pitchFamily="34" charset="0"/>
+                <a:ea typeface="Calibri" pitchFamily="34" charset="-122"/>
+                <a:cs typeface="Calibri" pitchFamily="34" charset="-120"/>
+              </a:rPr>
+              <a:t>An eval set sounds heavy, but it's just a handful of cases with known-good answers — here's how to put one together.</a:t>
+            </a:r>
+            <a:endParaRPr lang="en-US" sz="1500" dirty="0"/>
+          </a:p>
+        </p:txBody>
+      </p:sp>
+      <p:sp>
+        <p:nvSpPr>
+          <p:cNvPr id="5" name="Shape 3"/>
           <p:cNvSpPr/>
           <p:nvPr/>
         </p:nvSpPr>
         <p:spPr>
           <a:xfrm>
-            <a:off x="548640" y="2103120"/>
+            <a:off x="548640" y="2432304"/>
             <a:ext cx="530352" cy="530352"/>
           </a:xfrm>
           <a:prstGeom prst="ellipse">
@@ -7203,13 +7320,13 @@
       </p:sp>
       <p:sp>
         <p:nvSpPr>
-          <p:cNvPr id="5" name="Text 3"/>
-          <p:cNvSpPr txBox="1"/>
-          <p:nvPr/>
-        </p:nvSpPr>
-        <p:spPr>
-          <a:xfrm>
-            <a:off x="548640" y="2103120"/>
+          <p:cNvPr id="6" name="Text 4"/>
+          <p:cNvSpPr txBox="1"/>
+          <p:nvPr/>
+        </p:nvSpPr>
+        <p:spPr>
+          <a:xfrm>
+            <a:off x="548640" y="2432304"/>
             <a:ext cx="530352" cy="530352"/>
           </a:xfrm>
           <a:prstGeom prst="rect">
@@ -7242,13 +7359,13 @@
       </p:sp>
       <p:sp>
         <p:nvSpPr>
-          <p:cNvPr id="6" name="Text 4"/>
-          <p:cNvSpPr txBox="1"/>
-          <p:nvPr/>
-        </p:nvSpPr>
-        <p:spPr>
-          <a:xfrm>
-            <a:off x="1325880" y="2084832"/>
+          <p:cNvPr id="7" name="Text 5"/>
+          <p:cNvSpPr txBox="1"/>
+          <p:nvPr/>
+        </p:nvSpPr>
+        <p:spPr>
+          <a:xfrm>
+            <a:off x="1325880" y="2414016"/>
             <a:ext cx="10424160" cy="411480"/>
           </a:xfrm>
           <a:prstGeom prst="rect">
@@ -7281,14 +7398,14 @@
       </p:sp>
       <p:sp>
         <p:nvSpPr>
-          <p:cNvPr id="7" name="Text 5"/>
-          <p:cNvSpPr txBox="1"/>
-          <p:nvPr/>
-        </p:nvSpPr>
-        <p:spPr>
-          <a:xfrm>
-            <a:off x="1325880" y="2468880"/>
-            <a:ext cx="10424160" cy="667512"/>
+          <p:cNvPr id="8" name="Text 6"/>
+          <p:cNvSpPr txBox="1"/>
+          <p:nvPr/>
+        </p:nvSpPr>
+        <p:spPr>
+          <a:xfrm>
+            <a:off x="1325880" y="2798064"/>
+            <a:ext cx="10424160" cy="585216"/>
           </a:xfrm>
           <a:prstGeom prst="rect">
             <a:avLst/>
@@ -7320,13 +7437,13 @@
       </p:sp>
       <p:sp>
         <p:nvSpPr>
-          <p:cNvPr id="8" name="Shape 6"/>
+          <p:cNvPr id="9" name="Shape 7"/>
           <p:cNvSpPr/>
           <p:nvPr/>
         </p:nvSpPr>
         <p:spPr>
           <a:xfrm>
-            <a:off x="548640" y="3209544"/>
+            <a:off x="548640" y="3456432"/>
             <a:ext cx="530352" cy="530352"/>
           </a:xfrm>
           <a:prstGeom prst="ellipse">
@@ -7340,13 +7457,13 @@
       </p:sp>
       <p:sp>
         <p:nvSpPr>
-          <p:cNvPr id="9" name="Text 7"/>
-          <p:cNvSpPr txBox="1"/>
-          <p:nvPr/>
-        </p:nvSpPr>
-        <p:spPr>
-          <a:xfrm>
-            <a:off x="548640" y="3209544"/>
+          <p:cNvPr id="10" name="Text 8"/>
+          <p:cNvSpPr txBox="1"/>
+          <p:nvPr/>
+        </p:nvSpPr>
+        <p:spPr>
+          <a:xfrm>
+            <a:off x="548640" y="3456432"/>
             <a:ext cx="530352" cy="530352"/>
           </a:xfrm>
           <a:prstGeom prst="rect">
@@ -7379,13 +7496,13 @@
       </p:sp>
       <p:sp>
         <p:nvSpPr>
-          <p:cNvPr id="10" name="Text 8"/>
-          <p:cNvSpPr txBox="1"/>
-          <p:nvPr/>
-        </p:nvSpPr>
-        <p:spPr>
-          <a:xfrm>
-            <a:off x="1325880" y="3191256"/>
+          <p:cNvPr id="11" name="Text 9"/>
+          <p:cNvSpPr txBox="1"/>
+          <p:nvPr/>
+        </p:nvSpPr>
+        <p:spPr>
+          <a:xfrm>
+            <a:off x="1325880" y="3438144"/>
             <a:ext cx="10424160" cy="411480"/>
           </a:xfrm>
           <a:prstGeom prst="rect">
@@ -7418,14 +7535,14 @@
       </p:sp>
       <p:sp>
         <p:nvSpPr>
-          <p:cNvPr id="11" name="Text 9"/>
-          <p:cNvSpPr txBox="1"/>
-          <p:nvPr/>
-        </p:nvSpPr>
-        <p:spPr>
-          <a:xfrm>
-            <a:off x="1325880" y="3575304"/>
-            <a:ext cx="10424160" cy="667512"/>
+          <p:cNvPr id="12" name="Text 10"/>
+          <p:cNvSpPr txBox="1"/>
+          <p:nvPr/>
+        </p:nvSpPr>
+        <p:spPr>
+          <a:xfrm>
+            <a:off x="1325880" y="3822192"/>
+            <a:ext cx="10424160" cy="585216"/>
           </a:xfrm>
           <a:prstGeom prst="rect">
             <a:avLst/>
@@ -7457,13 +7574,13 @@
       </p:sp>
       <p:sp>
         <p:nvSpPr>
-          <p:cNvPr id="12" name="Shape 10"/>
+          <p:cNvPr id="13" name="Shape 11"/>
           <p:cNvSpPr/>
           <p:nvPr/>
         </p:nvSpPr>
         <p:spPr>
           <a:xfrm>
-            <a:off x="548640" y="4315968"/>
+            <a:off x="548640" y="4480560"/>
             <a:ext cx="530352" cy="530352"/>
           </a:xfrm>
           <a:prstGeom prst="ellipse">
@@ -7477,13 +7594,13 @@
       </p:sp>
       <p:sp>
         <p:nvSpPr>
-          <p:cNvPr id="13" name="Text 11"/>
-          <p:cNvSpPr txBox="1"/>
-          <p:nvPr/>
-        </p:nvSpPr>
-        <p:spPr>
-          <a:xfrm>
-            <a:off x="548640" y="4315968"/>
+          <p:cNvPr id="14" name="Text 12"/>
+          <p:cNvSpPr txBox="1"/>
+          <p:nvPr/>
+        </p:nvSpPr>
+        <p:spPr>
+          <a:xfrm>
+            <a:off x="548640" y="4480560"/>
             <a:ext cx="530352" cy="530352"/>
           </a:xfrm>
           <a:prstGeom prst="rect">
@@ -7516,13 +7633,13 @@
       </p:sp>
       <p:sp>
         <p:nvSpPr>
-          <p:cNvPr id="14" name="Text 12"/>
-          <p:cNvSpPr txBox="1"/>
-          <p:nvPr/>
-        </p:nvSpPr>
-        <p:spPr>
-          <a:xfrm>
-            <a:off x="1325880" y="4297680"/>
+          <p:cNvPr id="15" name="Text 13"/>
+          <p:cNvSpPr txBox="1"/>
+          <p:nvPr/>
+        </p:nvSpPr>
+        <p:spPr>
+          <a:xfrm>
+            <a:off x="1325880" y="4462272"/>
             <a:ext cx="10424160" cy="411480"/>
           </a:xfrm>
           <a:prstGeom prst="rect">
@@ -7555,14 +7672,14 @@
       </p:sp>
       <p:sp>
         <p:nvSpPr>
-          <p:cNvPr id="15" name="Text 13"/>
-          <p:cNvSpPr txBox="1"/>
-          <p:nvPr/>
-        </p:nvSpPr>
-        <p:spPr>
-          <a:xfrm>
-            <a:off x="1325880" y="4681728"/>
-            <a:ext cx="10424160" cy="667512"/>
+          <p:cNvPr id="16" name="Text 14"/>
+          <p:cNvSpPr txBox="1"/>
+          <p:nvPr/>
+        </p:nvSpPr>
+        <p:spPr>
+          <a:xfrm>
+            <a:off x="1325880" y="4846320"/>
+            <a:ext cx="10424160" cy="585216"/>
           </a:xfrm>
           <a:prstGeom prst="rect">
             <a:avLst/>
@@ -7594,13 +7711,13 @@
       </p:sp>
       <p:sp>
         <p:nvSpPr>
-          <p:cNvPr id="16" name="Shape 14"/>
+          <p:cNvPr id="17" name="Shape 15"/>
           <p:cNvSpPr/>
           <p:nvPr/>
         </p:nvSpPr>
         <p:spPr>
           <a:xfrm>
-            <a:off x="548640" y="5422392"/>
+            <a:off x="548640" y="5504688"/>
             <a:ext cx="530352" cy="530352"/>
           </a:xfrm>
           <a:prstGeom prst="ellipse">
@@ -7614,13 +7731,13 @@
       </p:sp>
       <p:sp>
         <p:nvSpPr>
-          <p:cNvPr id="17" name="Text 15"/>
-          <p:cNvSpPr txBox="1"/>
-          <p:nvPr/>
-        </p:nvSpPr>
-        <p:spPr>
-          <a:xfrm>
-            <a:off x="548640" y="5422392"/>
+          <p:cNvPr id="18" name="Text 16"/>
+          <p:cNvSpPr txBox="1"/>
+          <p:nvPr/>
+        </p:nvSpPr>
+        <p:spPr>
+          <a:xfrm>
+            <a:off x="548640" y="5504688"/>
             <a:ext cx="530352" cy="530352"/>
           </a:xfrm>
           <a:prstGeom prst="rect">
@@ -7653,13 +7770,13 @@
       </p:sp>
       <p:sp>
         <p:nvSpPr>
-          <p:cNvPr id="18" name="Text 16"/>
-          <p:cNvSpPr txBox="1"/>
-          <p:nvPr/>
-        </p:nvSpPr>
-        <p:spPr>
-          <a:xfrm>
-            <a:off x="1325880" y="5404104"/>
+          <p:cNvPr id="19" name="Text 17"/>
+          <p:cNvSpPr txBox="1"/>
+          <p:nvPr/>
+        </p:nvSpPr>
+        <p:spPr>
+          <a:xfrm>
+            <a:off x="1325880" y="5486400"/>
             <a:ext cx="10424160" cy="411480"/>
           </a:xfrm>
           <a:prstGeom prst="rect">
@@ -7692,14 +7809,14 @@
       </p:sp>
       <p:sp>
         <p:nvSpPr>
-          <p:cNvPr id="19" name="Text 17"/>
-          <p:cNvSpPr txBox="1"/>
-          <p:nvPr/>
-        </p:nvSpPr>
-        <p:spPr>
-          <a:xfrm>
-            <a:off x="1325880" y="5788152"/>
-            <a:ext cx="10424160" cy="667512"/>
+          <p:cNvPr id="20" name="Text 18"/>
+          <p:cNvSpPr txBox="1"/>
+          <p:nvPr/>
+        </p:nvSpPr>
+        <p:spPr>
+          <a:xfrm>
+            <a:off x="1325880" y="5870448"/>
+            <a:ext cx="10424160" cy="585216"/>
           </a:xfrm>
           <a:prstGeom prst="rect">
             <a:avLst/>
@@ -7731,7 +7848,7 @@
       </p:sp>
       <p:sp>
         <p:nvSpPr>
-          <p:cNvPr id="20" name="Shape 18"/>
+          <p:cNvPr id="21" name="Shape 19"/>
           <p:cNvSpPr/>
           <p:nvPr/>
         </p:nvSpPr>
@@ -7753,7 +7870,7 @@
       </p:sp>
       <p:sp>
         <p:nvSpPr>
-          <p:cNvPr id="21" name="Text 19"/>
+          <p:cNvPr id="22" name="Text 20"/>
           <p:cNvSpPr txBox="1"/>
           <p:nvPr/>
         </p:nvSpPr>
@@ -7792,7 +7909,7 @@
       </p:sp>
       <p:sp>
         <p:nvSpPr>
-          <p:cNvPr id="22" name="Text 20"/>
+          <p:cNvPr id="23" name="Text 21"/>
           <p:cNvSpPr txBox="1"/>
           <p:nvPr/>
         </p:nvSpPr>
@@ -7831,7 +7948,7 @@
       </p:sp>
       <p:sp>
         <p:nvSpPr>
-          <p:cNvPr id="23" name="Text 21"/>
+          <p:cNvPr id="24" name="Text 22"/>
           <p:cNvSpPr txBox="1"/>
           <p:nvPr/>
         </p:nvSpPr>
@@ -7986,8 +8103,47 @@
         </p:nvSpPr>
         <p:spPr>
           <a:xfrm>
-            <a:off x="548640" y="2057400"/>
-            <a:ext cx="4709160" cy="3749040"/>
+            <a:off x="548640" y="1627632"/>
+            <a:ext cx="10881360" cy="502920"/>
+          </a:xfrm>
+          <a:prstGeom prst="rect">
+            <a:avLst/>
+          </a:prstGeom>
+          <a:noFill/>
+          <a:ln/>
+        </p:spPr>
+        <p:txBody>
+          <a:bodyPr wrap="square" lIns="0" tIns="0" rIns="0" bIns="0" rtlCol="0" anchor="t"/>
+          <a:lstStyle/>
+          <a:p>
+            <a:pPr algn="l" indent="0" marL="0">
+              <a:buNone/>
+            </a:pPr>
+            <a:r>
+              <a:rPr lang="en-US" sz="1500" dirty="0">
+                <a:solidFill>
+                  <a:srgbClr val="A9B1D6"/>
+                </a:solidFill>
+                <a:latin typeface="Calibri" pitchFamily="34" charset="0"/>
+                <a:ea typeface="Calibri" pitchFamily="34" charset="-122"/>
+                <a:cs typeface="Calibri" pitchFamily="34" charset="-120"/>
+              </a:rPr>
+              <a:t>When there's no single right answer to check against, you can hand the grading to another model — carefully.</a:t>
+            </a:r>
+            <a:endParaRPr lang="en-US" sz="1500" dirty="0"/>
+          </a:p>
+        </p:txBody>
+      </p:sp>
+      <p:sp>
+        <p:nvSpPr>
+          <p:cNvPr id="5" name="Text 3"/>
+          <p:cNvSpPr txBox="1"/>
+          <p:nvPr/>
+        </p:nvSpPr>
+        <p:spPr>
+          <a:xfrm>
+            <a:off x="548640" y="2386584"/>
+            <a:ext cx="4709160" cy="3419856"/>
           </a:xfrm>
           <a:prstGeom prst="rect">
             <a:avLst/>
@@ -8125,18 +8281,18 @@
       </p:sp>
       <p:sp>
         <p:nvSpPr>
-          <p:cNvPr id="5" name="Shape 3"/>
+          <p:cNvPr id="6" name="Shape 4"/>
           <p:cNvSpPr/>
           <p:nvPr/>
         </p:nvSpPr>
         <p:spPr>
           <a:xfrm>
-            <a:off x="5532120" y="2057400"/>
-            <a:ext cx="6108192" cy="3794760"/>
+            <a:off x="5532120" y="2386584"/>
+            <a:ext cx="6108192" cy="3465576"/>
           </a:xfrm>
           <a:prstGeom prst="roundRect">
             <a:avLst>
-              <a:gd name="adj" fmla="val 1446"/>
+              <a:gd name="adj" fmla="val 1583"/>
             </a:avLst>
           </a:prstGeom>
           <a:solidFill>
@@ -8152,13 +8308,13 @@
       </p:sp>
       <p:sp>
         <p:nvSpPr>
-          <p:cNvPr id="6" name="Text 4"/>
-          <p:cNvSpPr txBox="1"/>
-          <p:nvPr/>
-        </p:nvSpPr>
-        <p:spPr>
-          <a:xfrm>
-            <a:off x="5760720" y="2194560"/>
+          <p:cNvPr id="7" name="Text 5"/>
+          <p:cNvSpPr txBox="1"/>
+          <p:nvPr/>
+        </p:nvSpPr>
+        <p:spPr>
+          <a:xfrm>
+            <a:off x="5760720" y="2523744"/>
             <a:ext cx="5650992" cy="320040"/>
           </a:xfrm>
           <a:prstGeom prst="rect">
@@ -8191,14 +8347,14 @@
       </p:sp>
       <p:sp>
         <p:nvSpPr>
-          <p:cNvPr id="7" name="Text 5"/>
-          <p:cNvSpPr txBox="1"/>
-          <p:nvPr/>
-        </p:nvSpPr>
-        <p:spPr>
-          <a:xfrm>
-            <a:off x="5788152" y="2560320"/>
-            <a:ext cx="5596128" cy="3108960"/>
+          <p:cNvPr id="8" name="Text 6"/>
+          <p:cNvSpPr txBox="1"/>
+          <p:nvPr/>
+        </p:nvSpPr>
+        <p:spPr>
+          <a:xfrm>
+            <a:off x="5788152" y="2889504"/>
+            <a:ext cx="5596128" cy="2779776"/>
           </a:xfrm>
           <a:prstGeom prst="rect">
             <a:avLst/>
@@ -8401,7 +8557,7 @@
       </p:sp>
       <p:sp>
         <p:nvSpPr>
-          <p:cNvPr id="8" name="Shape 6"/>
+          <p:cNvPr id="9" name="Shape 7"/>
           <p:cNvSpPr/>
           <p:nvPr/>
         </p:nvSpPr>
@@ -8423,7 +8579,7 @@
       </p:sp>
       <p:sp>
         <p:nvSpPr>
-          <p:cNvPr id="9" name="Text 7"/>
+          <p:cNvPr id="10" name="Text 8"/>
           <p:cNvSpPr txBox="1"/>
           <p:nvPr/>
         </p:nvSpPr>
@@ -8462,7 +8618,7 @@
       </p:sp>
       <p:sp>
         <p:nvSpPr>
-          <p:cNvPr id="10" name="Text 8"/>
+          <p:cNvPr id="11" name="Text 9"/>
           <p:cNvSpPr txBox="1"/>
           <p:nvPr/>
         </p:nvSpPr>
@@ -8501,7 +8657,7 @@
       </p:sp>
       <p:sp>
         <p:nvSpPr>
-          <p:cNvPr id="11" name="Text 9"/>
+          <p:cNvPr id="12" name="Text 10"/>
           <p:cNvSpPr txBox="1"/>
           <p:nvPr/>
         </p:nvSpPr>
@@ -8656,8 +8812,47 @@
         </p:nvSpPr>
         <p:spPr>
           <a:xfrm>
-            <a:off x="548640" y="2011680"/>
-            <a:ext cx="6126480" cy="3840480"/>
+            <a:off x="548640" y="1627632"/>
+            <a:ext cx="10881360" cy="502920"/>
+          </a:xfrm>
+          <a:prstGeom prst="rect">
+            <a:avLst/>
+          </a:prstGeom>
+          <a:noFill/>
+          <a:ln/>
+        </p:spPr>
+        <p:txBody>
+          <a:bodyPr wrap="square" lIns="0" tIns="0" rIns="0" bIns="0" rtlCol="0" anchor="t"/>
+          <a:lstStyle/>
+          <a:p>
+            <a:pPr algn="l" indent="0" marL="0">
+              <a:buNone/>
+            </a:pPr>
+            <a:r>
+              <a:rPr lang="en-US" sz="1500" dirty="0">
+                <a:solidFill>
+                  <a:srgbClr val="A9B1D6"/>
+                </a:solidFill>
+                <a:latin typeface="Calibri" pitchFamily="34" charset="0"/>
+                <a:ea typeface="Calibri" pitchFamily="34" charset="-122"/>
+                <a:cs typeface="Calibri" pitchFamily="34" charset="-120"/>
+              </a:rPr>
+              <a:t>Prompts are code, so treat them like it: version them, and never assume a fix didn't break something else.</a:t>
+            </a:r>
+            <a:endParaRPr lang="en-US" sz="1500" dirty="0"/>
+          </a:p>
+        </p:txBody>
+      </p:sp>
+      <p:sp>
+        <p:nvSpPr>
+          <p:cNvPr id="5" name="Text 3"/>
+          <p:cNvSpPr txBox="1"/>
+          <p:nvPr/>
+        </p:nvSpPr>
+        <p:spPr>
+          <a:xfrm>
+            <a:off x="548640" y="2340864"/>
+            <a:ext cx="6126480" cy="3511296"/>
           </a:xfrm>
           <a:prstGeom prst="rect">
             <a:avLst/>
@@ -8795,18 +8990,18 @@
       </p:sp>
       <p:sp>
         <p:nvSpPr>
-          <p:cNvPr id="5" name="Shape 3"/>
+          <p:cNvPr id="6" name="Shape 4"/>
           <p:cNvSpPr/>
           <p:nvPr/>
         </p:nvSpPr>
         <p:spPr>
           <a:xfrm>
-            <a:off x="6995160" y="2148840"/>
-            <a:ext cx="4645152" cy="3383280"/>
+            <a:off x="6995160" y="2478024"/>
+            <a:ext cx="4645152" cy="3054096"/>
           </a:xfrm>
           <a:prstGeom prst="roundRect">
             <a:avLst>
-              <a:gd name="adj" fmla="val 2432"/>
+              <a:gd name="adj" fmla="val 2695"/>
             </a:avLst>
           </a:prstGeom>
           <a:solidFill>
@@ -8822,13 +9017,13 @@
       </p:sp>
       <p:sp>
         <p:nvSpPr>
-          <p:cNvPr id="6" name="Shape 4"/>
+          <p:cNvPr id="7" name="Shape 5"/>
           <p:cNvSpPr/>
           <p:nvPr/>
         </p:nvSpPr>
         <p:spPr>
           <a:xfrm>
-            <a:off x="7269480" y="2423160"/>
+            <a:off x="7269480" y="2752344"/>
             <a:ext cx="457200" cy="457200"/>
           </a:xfrm>
           <a:prstGeom prst="ellipse">
@@ -8842,13 +9037,13 @@
       </p:sp>
       <p:sp>
         <p:nvSpPr>
-          <p:cNvPr id="7" name="Text 5"/>
-          <p:cNvSpPr txBox="1"/>
-          <p:nvPr/>
-        </p:nvSpPr>
-        <p:spPr>
-          <a:xfrm>
-            <a:off x="7818120" y="2450592"/>
+          <p:cNvPr id="8" name="Text 6"/>
+          <p:cNvSpPr txBox="1"/>
+          <p:nvPr/>
+        </p:nvSpPr>
+        <p:spPr>
+          <a:xfrm>
+            <a:off x="7818120" y="2779776"/>
             <a:ext cx="3657600" cy="411480"/>
           </a:xfrm>
           <a:prstGeom prst="rect">
@@ -8881,14 +9076,14 @@
       </p:sp>
       <p:sp>
         <p:nvSpPr>
-          <p:cNvPr id="8" name="Text 6"/>
-          <p:cNvSpPr txBox="1"/>
-          <p:nvPr/>
-        </p:nvSpPr>
-        <p:spPr>
-          <a:xfrm>
-            <a:off x="7269480" y="3108960"/>
-            <a:ext cx="4160520" cy="2286000"/>
+          <p:cNvPr id="9" name="Text 7"/>
+          <p:cNvSpPr txBox="1"/>
+          <p:nvPr/>
+        </p:nvSpPr>
+        <p:spPr>
+          <a:xfrm>
+            <a:off x="7269480" y="3438144"/>
+            <a:ext cx="4160520" cy="1865376"/>
           </a:xfrm>
           <a:prstGeom prst="rect">
             <a:avLst/>
@@ -8920,7 +9115,7 @@
       </p:sp>
       <p:sp>
         <p:nvSpPr>
-          <p:cNvPr id="9" name="Shape 7"/>
+          <p:cNvPr id="10" name="Shape 8"/>
           <p:cNvSpPr/>
           <p:nvPr/>
         </p:nvSpPr>
@@ -8942,7 +9137,7 @@
       </p:sp>
       <p:sp>
         <p:nvSpPr>
-          <p:cNvPr id="10" name="Text 8"/>
+          <p:cNvPr id="11" name="Text 9"/>
           <p:cNvSpPr txBox="1"/>
           <p:nvPr/>
         </p:nvSpPr>
@@ -8981,7 +9176,7 @@
       </p:sp>
       <p:sp>
         <p:nvSpPr>
-          <p:cNvPr id="11" name="Text 9"/>
+          <p:cNvPr id="12" name="Text 10"/>
           <p:cNvSpPr txBox="1"/>
           <p:nvPr/>
         </p:nvSpPr>
@@ -9020,7 +9215,7 @@
       </p:sp>
       <p:sp>
         <p:nvSpPr>
-          <p:cNvPr id="12" name="Text 10"/>
+          <p:cNvPr id="13" name="Text 11"/>
           <p:cNvSpPr txBox="1"/>
           <p:nvPr/>
         </p:nvSpPr>
@@ -9175,8 +9370,47 @@
         </p:nvSpPr>
         <p:spPr>
           <a:xfrm>
-            <a:off x="548640" y="2011680"/>
-            <a:ext cx="6126480" cy="3840480"/>
+            <a:off x="548640" y="1627632"/>
+            <a:ext cx="10881360" cy="502920"/>
+          </a:xfrm>
+          <a:prstGeom prst="rect">
+            <a:avLst/>
+          </a:prstGeom>
+          <a:noFill/>
+          <a:ln/>
+        </p:spPr>
+        <p:txBody>
+          <a:bodyPr wrap="square" lIns="0" tIns="0" rIns="0" bIns="0" rtlCol="0" anchor="t"/>
+          <a:lstStyle/>
+          <a:p>
+            <a:pPr algn="l" indent="0" marL="0">
+              <a:buNone/>
+            </a:pPr>
+            <a:r>
+              <a:rPr lang="en-US" sz="1500" dirty="0">
+                <a:solidFill>
+                  <a:srgbClr val="A9B1D6"/>
+                </a:solidFill>
+                <a:latin typeface="Calibri" pitchFamily="34" charset="0"/>
+                <a:ea typeface="Calibri" pitchFamily="34" charset="-122"/>
+                <a:cs typeface="Calibri" pitchFamily="34" charset="-120"/>
+              </a:rPr>
+              <a:t>Here's the humbling part — tiny, meaningless-looking changes can swing your results, so test for it on purpose.</a:t>
+            </a:r>
+            <a:endParaRPr lang="en-US" sz="1500" dirty="0"/>
+          </a:p>
+        </p:txBody>
+      </p:sp>
+      <p:sp>
+        <p:nvSpPr>
+          <p:cNvPr id="5" name="Text 3"/>
+          <p:cNvSpPr txBox="1"/>
+          <p:nvPr/>
+        </p:nvSpPr>
+        <p:spPr>
+          <a:xfrm>
+            <a:off x="548640" y="2340864"/>
+            <a:ext cx="6126480" cy="3511296"/>
           </a:xfrm>
           <a:prstGeom prst="rect">
             <a:avLst/>
@@ -9314,18 +9548,18 @@
       </p:sp>
       <p:sp>
         <p:nvSpPr>
-          <p:cNvPr id="5" name="Shape 3"/>
+          <p:cNvPr id="6" name="Shape 4"/>
           <p:cNvSpPr/>
           <p:nvPr/>
         </p:nvSpPr>
         <p:spPr>
           <a:xfrm>
-            <a:off x="6995160" y="2148840"/>
-            <a:ext cx="4645152" cy="3383280"/>
+            <a:off x="6995160" y="2478024"/>
+            <a:ext cx="4645152" cy="3054096"/>
           </a:xfrm>
           <a:prstGeom prst="roundRect">
             <a:avLst>
-              <a:gd name="adj" fmla="val 2432"/>
+              <a:gd name="adj" fmla="val 2695"/>
             </a:avLst>
           </a:prstGeom>
           <a:solidFill>
@@ -9341,13 +9575,13 @@
       </p:sp>
       <p:sp>
         <p:nvSpPr>
-          <p:cNvPr id="6" name="Shape 4"/>
+          <p:cNvPr id="7" name="Shape 5"/>
           <p:cNvSpPr/>
           <p:nvPr/>
         </p:nvSpPr>
         <p:spPr>
           <a:xfrm>
-            <a:off x="7269480" y="2423160"/>
+            <a:off x="7269480" y="2752344"/>
             <a:ext cx="457200" cy="457200"/>
           </a:xfrm>
           <a:prstGeom prst="ellipse">
@@ -9361,13 +9595,13 @@
       </p:sp>
       <p:sp>
         <p:nvSpPr>
-          <p:cNvPr id="7" name="Text 5"/>
-          <p:cNvSpPr txBox="1"/>
-          <p:nvPr/>
-        </p:nvSpPr>
-        <p:spPr>
-          <a:xfrm>
-            <a:off x="7818120" y="2450592"/>
+          <p:cNvPr id="8" name="Text 6"/>
+          <p:cNvSpPr txBox="1"/>
+          <p:nvPr/>
+        </p:nvSpPr>
+        <p:spPr>
+          <a:xfrm>
+            <a:off x="7818120" y="2779776"/>
             <a:ext cx="3657600" cy="411480"/>
           </a:xfrm>
           <a:prstGeom prst="rect">
@@ -9400,14 +9634,14 @@
       </p:sp>
       <p:sp>
         <p:nvSpPr>
-          <p:cNvPr id="8" name="Text 6"/>
-          <p:cNvSpPr txBox="1"/>
-          <p:nvPr/>
-        </p:nvSpPr>
-        <p:spPr>
-          <a:xfrm>
-            <a:off x="7269480" y="3108960"/>
-            <a:ext cx="4160520" cy="2286000"/>
+          <p:cNvPr id="9" name="Text 7"/>
+          <p:cNvSpPr txBox="1"/>
+          <p:nvPr/>
+        </p:nvSpPr>
+        <p:spPr>
+          <a:xfrm>
+            <a:off x="7269480" y="3438144"/>
+            <a:ext cx="4160520" cy="1865376"/>
           </a:xfrm>
           <a:prstGeom prst="rect">
             <a:avLst/>
@@ -9439,7 +9673,7 @@
       </p:sp>
       <p:sp>
         <p:nvSpPr>
-          <p:cNvPr id="9" name="Shape 7"/>
+          <p:cNvPr id="10" name="Shape 8"/>
           <p:cNvSpPr/>
           <p:nvPr/>
         </p:nvSpPr>
@@ -9461,7 +9695,7 @@
       </p:sp>
       <p:sp>
         <p:nvSpPr>
-          <p:cNvPr id="10" name="Text 8"/>
+          <p:cNvPr id="11" name="Text 9"/>
           <p:cNvSpPr txBox="1"/>
           <p:nvPr/>
         </p:nvSpPr>
@@ -9500,7 +9734,7 @@
       </p:sp>
       <p:sp>
         <p:nvSpPr>
-          <p:cNvPr id="11" name="Text 9"/>
+          <p:cNvPr id="12" name="Text 10"/>
           <p:cNvSpPr txBox="1"/>
           <p:nvPr/>
         </p:nvSpPr>
@@ -9539,7 +9773,7 @@
       </p:sp>
       <p:sp>
         <p:nvSpPr>
-          <p:cNvPr id="12" name="Text 10"/>
+          <p:cNvPr id="13" name="Text 11"/>
           <p:cNvSpPr txBox="1"/>
           <p:nvPr/>
         </p:nvSpPr>
